--- a/TS_PPT.pptx
+++ b/TS_PPT.pptx
@@ -5,7 +5,7 @@
     <p:sldMasterId id="2147483660" r:id="rId1"/>
   </p:sldMasterIdLst>
   <p:notesMasterIdLst>
-    <p:notesMasterId r:id="rId18"/>
+    <p:notesMasterId r:id="rId20"/>
   </p:notesMasterIdLst>
   <p:sldIdLst>
     <p:sldId id="256" r:id="rId2"/>
@@ -23,7 +23,9 @@
     <p:sldId id="309" r:id="rId14"/>
     <p:sldId id="266" r:id="rId15"/>
     <p:sldId id="308" r:id="rId16"/>
-    <p:sldId id="258" r:id="rId17"/>
+    <p:sldId id="317" r:id="rId17"/>
+    <p:sldId id="318" r:id="rId18"/>
+    <p:sldId id="258" r:id="rId19"/>
   </p:sldIdLst>
   <p:sldSz cx="12192000" cy="6858000"/>
   <p:notesSz cx="6858000" cy="9144000"/>
@@ -283,7 +285,7 @@
               <a:pPr>
                 <a:defRPr/>
               </a:pPr>
-              <a:t>4/20/2026</a:t>
+              <a:t>4/23/2026</a:t>
             </a:fld>
             <a:endParaRPr lang="en-US"/>
           </a:p>
@@ -1588,7 +1590,7 @@
               <a:pPr>
                 <a:defRPr/>
               </a:pPr>
-              <a:t>4/20/2026</a:t>
+              <a:t>4/23/2026</a:t>
             </a:fld>
             <a:endParaRPr lang="en-US"/>
           </a:p>
@@ -1786,7 +1788,7 @@
               <a:pPr>
                 <a:defRPr/>
               </a:pPr>
-              <a:t>4/20/2026</a:t>
+              <a:t>4/23/2026</a:t>
             </a:fld>
             <a:endParaRPr lang="en-US"/>
           </a:p>
@@ -1984,7 +1986,7 @@
               <a:pPr>
                 <a:defRPr/>
               </a:pPr>
-              <a:t>4/20/2026</a:t>
+              <a:t>4/23/2026</a:t>
             </a:fld>
             <a:endParaRPr lang="en-US"/>
           </a:p>
@@ -2177,7 +2179,7 @@
               <a:pPr>
                 <a:defRPr/>
               </a:pPr>
-              <a:t>4/20/2026</a:t>
+              <a:t>4/23/2026</a:t>
             </a:fld>
             <a:endParaRPr lang="en-US"/>
           </a:p>
@@ -3257,7 +3259,7 @@
               <a:pPr>
                 <a:defRPr/>
               </a:pPr>
-              <a:t>4/20/2026</a:t>
+              <a:t>4/23/2026</a:t>
             </a:fld>
             <a:endParaRPr lang="en-US"/>
           </a:p>
@@ -3516,7 +3518,7 @@
               <a:pPr>
                 <a:defRPr/>
               </a:pPr>
-              <a:t>4/20/2026</a:t>
+              <a:t>4/23/2026</a:t>
             </a:fld>
             <a:endParaRPr lang="en-US"/>
           </a:p>
@@ -3870,7 +3872,7 @@
               <a:pPr>
                 <a:defRPr/>
               </a:pPr>
-              <a:t>4/20/2026</a:t>
+              <a:t>4/23/2026</a:t>
             </a:fld>
             <a:endParaRPr lang="en-US"/>
           </a:p>
@@ -4007,7 +4009,7 @@
               <a:pPr>
                 <a:defRPr/>
               </a:pPr>
-              <a:t>4/20/2026</a:t>
+              <a:t>4/23/2026</a:t>
             </a:fld>
             <a:endParaRPr lang="en-US"/>
           </a:p>
@@ -4122,7 +4124,7 @@
               <a:pPr>
                 <a:defRPr/>
               </a:pPr>
-              <a:t>4/20/2026</a:t>
+              <a:t>4/23/2026</a:t>
             </a:fld>
             <a:endParaRPr lang="en-US"/>
           </a:p>
@@ -4691,7 +4693,7 @@
               <a:pPr>
                 <a:defRPr/>
               </a:pPr>
-              <a:t>4/20/2026</a:t>
+              <a:t>4/23/2026</a:t>
             </a:fld>
             <a:endParaRPr lang="en-US"/>
           </a:p>
@@ -5259,7 +5261,7 @@
               <a:pPr>
                 <a:defRPr/>
               </a:pPr>
-              <a:t>4/20/2026</a:t>
+              <a:t>4/23/2026</a:t>
             </a:fld>
             <a:endParaRPr lang="en-US"/>
           </a:p>
@@ -5555,7 +5557,7 @@
               <a:pPr>
                 <a:defRPr/>
               </a:pPr>
-              <a:t>4/20/2026</a:t>
+              <a:t>4/23/2026</a:t>
             </a:fld>
             <a:endParaRPr lang="en-US"/>
           </a:p>
@@ -7576,7 +7578,6 @@
               <a:rPr lang="en-IN" dirty="0"/>
               <a:t>Edge Computing: Process data closer to devices to reduce delay and improve real-time system performance.</a:t>
             </a:r>
-            <a:endParaRPr lang="en-IN" dirty="0"/>
           </a:p>
         </p:txBody>
       </p:sp>
@@ -8095,6 +8096,331 @@
       </p:grpSpPr>
       <p:sp>
         <p:nvSpPr>
+          <p:cNvPr id="3" name="Content Placeholder 2"/>
+          <p:cNvSpPr>
+            <a:spLocks noGrp="1"/>
+          </p:cNvSpPr>
+          <p:nvPr>
+            <p:ph sz="quarter" idx="1"/>
+          </p:nvPr>
+        </p:nvSpPr>
+        <p:spPr>
+          <a:xfrm>
+            <a:off x="685800" y="609600"/>
+            <a:ext cx="10668000" cy="6019800"/>
+          </a:xfrm>
+        </p:spPr>
+        <p:txBody>
+          <a:bodyPr/>
+          <a:lstStyle/>
+          <a:p>
+            <a:pPr marL="0" indent="0" algn="just">
+              <a:buNone/>
+            </a:pPr>
+            <a:r>
+              <a:rPr lang="en-US" dirty="0"/>
+              <a:t>[11] S. Wan, J. Lu, P. Fan, and K. B. </a:t>
+            </a:r>
+            <a:r>
+              <a:rPr lang="en-US" dirty="0" err="1"/>
+              <a:t>Letaief</a:t>
+            </a:r>
+            <a:r>
+              <a:rPr lang="en-US" dirty="0"/>
+              <a:t>, “Toward Smart Cities: Digital Twin-Enabled Internet of Things With </a:t>
+            </a:r>
+            <a:r>
+              <a:rPr lang="en-US" dirty="0" err="1"/>
+              <a:t>Blockchain</a:t>
+            </a:r>
+            <a:r>
+              <a:rPr lang="en-US" dirty="0"/>
+              <a:t> and Artificial Intelligence,” </a:t>
+            </a:r>
+            <a:r>
+              <a:rPr lang="en-US" i="1" dirty="0"/>
+              <a:t>IEEE Internet of Things Journal</a:t>
+            </a:r>
+            <a:r>
+              <a:rPr lang="en-US" dirty="0"/>
+              <a:t>, vol. 9, no. 14, pp. 12345–12356, 2022</a:t>
+            </a:r>
+            <a:r>
+              <a:rPr lang="en-US" dirty="0" smtClean="0"/>
+              <a:t>.</a:t>
+            </a:r>
+            <a:endParaRPr lang="en-IN" dirty="0" smtClean="0"/>
+          </a:p>
+          <a:p>
+            <a:pPr marL="0" indent="0" algn="just">
+              <a:buNone/>
+            </a:pPr>
+            <a:r>
+              <a:rPr lang="en-IN" dirty="0" smtClean="0"/>
+              <a:t>[12] M. Grieves and J. Vickers, “Digital Twin: Mitigating Unpredictable, Undesirable Emergent </a:t>
+            </a:r>
+            <a:r>
+              <a:rPr lang="en-IN" dirty="0" err="1" smtClean="0"/>
+              <a:t>Behavior</a:t>
+            </a:r>
+            <a:r>
+              <a:rPr lang="en-IN" dirty="0" smtClean="0"/>
+              <a:t> in Complex Systems,” </a:t>
+            </a:r>
+            <a:r>
+              <a:rPr lang="en-IN" i="1" dirty="0" smtClean="0"/>
+              <a:t>IEEE Systems Journal</a:t>
+            </a:r>
+            <a:r>
+              <a:rPr lang="en-IN" dirty="0" smtClean="0"/>
+              <a:t>, vol. 10, no. 3, pp. 1–8, 2017.</a:t>
+            </a:r>
+          </a:p>
+          <a:p>
+            <a:pPr marL="0" indent="0" algn="just">
+              <a:buNone/>
+            </a:pPr>
+            <a:r>
+              <a:rPr lang="en-US" dirty="0" smtClean="0"/>
+              <a:t>[</a:t>
+            </a:r>
+            <a:r>
+              <a:rPr lang="en-US" dirty="0"/>
+              <a:t>13] H. Ning, H. Liu, and J. Ma, “Cyber-Physical-Social Based Security Architecture for Future Internet of Things,” </a:t>
+            </a:r>
+            <a:r>
+              <a:rPr lang="en-US" i="1" dirty="0"/>
+              <a:t>IEEE Internet of Things Journal</a:t>
+            </a:r>
+            <a:r>
+              <a:rPr lang="en-US" dirty="0"/>
+              <a:t>, vol. 6, no. 2, pp. 1–12, 2019.</a:t>
+            </a:r>
+            <a:endParaRPr lang="en-IN" dirty="0"/>
+          </a:p>
+          <a:p>
+            <a:pPr marL="0" indent="0" algn="just">
+              <a:buNone/>
+            </a:pPr>
+            <a:r>
+              <a:rPr lang="en-US" dirty="0"/>
+              <a:t>[14] K. Zhang, Y. Mao, S. </a:t>
+            </a:r>
+            <a:r>
+              <a:rPr lang="en-US" dirty="0" err="1"/>
+              <a:t>Leng</a:t>
+            </a:r>
+            <a:r>
+              <a:rPr lang="en-US" dirty="0"/>
+              <a:t>, Y. He, and Y. Zhang, “Mobile Edge Computing for Intelligent </a:t>
+            </a:r>
+            <a:r>
+              <a:rPr lang="en-US" dirty="0" err="1"/>
+              <a:t>IoT</a:t>
+            </a:r>
+            <a:r>
+              <a:rPr lang="en-US" dirty="0"/>
+              <a:t> Systems: Trust and Security Perspective,” </a:t>
+            </a:r>
+            <a:r>
+              <a:rPr lang="en-US" i="1" dirty="0"/>
+              <a:t>IEEE Communications Magazine</a:t>
+            </a:r>
+            <a:r>
+              <a:rPr lang="en-US" dirty="0"/>
+              <a:t>, vol. 56, no. 10, pp. 1–7, 2018</a:t>
+            </a:r>
+            <a:r>
+              <a:rPr lang="en-US" dirty="0" smtClean="0"/>
+              <a:t>.</a:t>
+            </a:r>
+            <a:endParaRPr lang="en-IN" dirty="0"/>
+          </a:p>
+        </p:txBody>
+      </p:sp>
+      <p:sp>
+        <p:nvSpPr>
+          <p:cNvPr id="4" name="Slide Number Placeholder 3"/>
+          <p:cNvSpPr>
+            <a:spLocks noGrp="1"/>
+          </p:cNvSpPr>
+          <p:nvPr>
+            <p:ph type="sldNum" sz="quarter" idx="11"/>
+          </p:nvPr>
+        </p:nvSpPr>
+        <p:spPr/>
+        <p:txBody>
+          <a:bodyPr/>
+          <a:lstStyle/>
+          <a:p>
+            <a:fld id="{2D631849-9E7A-48DF-8D3C-4EBE4D8F2D94}" type="slidenum">
+              <a:rPr lang="en-US" altLang="en-US" smtClean="0"/>
+              <a:pPr/>
+              <a:t>16</a:t>
+            </a:fld>
+            <a:endParaRPr lang="en-US" altLang="en-US"/>
+          </a:p>
+        </p:txBody>
+      </p:sp>
+    </p:spTree>
+    <p:extLst>
+      <p:ext uri="{BB962C8B-B14F-4D97-AF65-F5344CB8AC3E}">
+        <p14:creationId xmlns:p14="http://schemas.microsoft.com/office/powerpoint/2010/main" val="1946153910"/>
+      </p:ext>
+    </p:extLst>
+  </p:cSld>
+  <p:clrMapOvr>
+    <a:masterClrMapping/>
+  </p:clrMapOvr>
+</p:sld>
+</file>
+
+<file path=ppt/slides/slide17.xml><?xml version="1.0" encoding="utf-8"?>
+<p:sld xmlns:a="http://schemas.openxmlformats.org/drawingml/2006/main" xmlns:r="http://schemas.openxmlformats.org/officeDocument/2006/relationships" xmlns:p="http://schemas.openxmlformats.org/presentationml/2006/main">
+  <p:cSld>
+    <p:spTree>
+      <p:nvGrpSpPr>
+        <p:cNvPr id="1" name=""/>
+        <p:cNvGrpSpPr/>
+        <p:nvPr/>
+      </p:nvGrpSpPr>
+      <p:grpSpPr>
+        <a:xfrm>
+          <a:off x="0" y="0"/>
+          <a:ext cx="0" cy="0"/>
+          <a:chOff x="0" y="0"/>
+          <a:chExt cx="0" cy="0"/>
+        </a:xfrm>
+      </p:grpSpPr>
+      <p:sp>
+        <p:nvSpPr>
+          <p:cNvPr id="3" name="Content Placeholder 2"/>
+          <p:cNvSpPr>
+            <a:spLocks noGrp="1"/>
+          </p:cNvSpPr>
+          <p:nvPr>
+            <p:ph sz="quarter" idx="1"/>
+          </p:nvPr>
+        </p:nvSpPr>
+        <p:spPr>
+          <a:xfrm>
+            <a:off x="609600" y="685800"/>
+            <a:ext cx="10668000" cy="4873752"/>
+          </a:xfrm>
+        </p:spPr>
+        <p:txBody>
+          <a:bodyPr/>
+          <a:lstStyle/>
+          <a:p>
+            <a:pPr marL="0" indent="0" algn="just">
+              <a:buNone/>
+            </a:pPr>
+            <a:r>
+              <a:rPr lang="en-US" dirty="0"/>
+              <a:t>[15] Q. Xu, Z. Su, and Y. Wang, “</a:t>
+            </a:r>
+            <a:r>
+              <a:rPr lang="en-US" dirty="0" err="1"/>
+              <a:t>Blockchain</a:t>
+            </a:r>
+            <a:r>
+              <a:rPr lang="en-US" dirty="0"/>
+              <a:t>-Based Trust Management in Distributed Systems: A Survey,” </a:t>
+            </a:r>
+            <a:r>
+              <a:rPr lang="en-US" i="1" dirty="0"/>
+              <a:t>IEEE Access</a:t>
+            </a:r>
+            <a:r>
+              <a:rPr lang="en-US" dirty="0"/>
+              <a:t>, vol. 9, pp. 112345–112360, 2021.</a:t>
+            </a:r>
+            <a:endParaRPr lang="en-IN" dirty="0"/>
+          </a:p>
+          <a:p>
+            <a:pPr marL="0" indent="0" algn="just">
+              <a:buNone/>
+            </a:pPr>
+            <a:r>
+              <a:rPr lang="en-US" dirty="0"/>
+              <a:t>[16] Y. Lu, “Digital Twin-Driven Smart Manufacturing: Connotation, Reference Model, Applications and Research Issues,” </a:t>
+            </a:r>
+            <a:r>
+              <a:rPr lang="en-US" i="1" dirty="0"/>
+              <a:t>IEEE Access</a:t>
+            </a:r>
+            <a:r>
+              <a:rPr lang="en-US" dirty="0"/>
+              <a:t>, vol. 8, pp. 187125–187140, 2020.</a:t>
+            </a:r>
+            <a:endParaRPr lang="en-IN" dirty="0"/>
+          </a:p>
+          <a:p>
+            <a:pPr algn="just"/>
+            <a:endParaRPr lang="en-IN" dirty="0"/>
+          </a:p>
+          <a:p>
+            <a:pPr algn="just"/>
+            <a:endParaRPr lang="en-IN" dirty="0"/>
+          </a:p>
+        </p:txBody>
+      </p:sp>
+      <p:sp>
+        <p:nvSpPr>
+          <p:cNvPr id="4" name="Slide Number Placeholder 3"/>
+          <p:cNvSpPr>
+            <a:spLocks noGrp="1"/>
+          </p:cNvSpPr>
+          <p:nvPr>
+            <p:ph type="sldNum" sz="quarter" idx="11"/>
+          </p:nvPr>
+        </p:nvSpPr>
+        <p:spPr/>
+        <p:txBody>
+          <a:bodyPr/>
+          <a:lstStyle/>
+          <a:p>
+            <a:fld id="{2D631849-9E7A-48DF-8D3C-4EBE4D8F2D94}" type="slidenum">
+              <a:rPr lang="en-US" altLang="en-US" smtClean="0"/>
+              <a:pPr/>
+              <a:t>17</a:t>
+            </a:fld>
+            <a:endParaRPr lang="en-US" altLang="en-US"/>
+          </a:p>
+        </p:txBody>
+      </p:sp>
+    </p:spTree>
+    <p:extLst>
+      <p:ext uri="{BB962C8B-B14F-4D97-AF65-F5344CB8AC3E}">
+        <p14:creationId xmlns:p14="http://schemas.microsoft.com/office/powerpoint/2010/main" val="2924046335"/>
+      </p:ext>
+    </p:extLst>
+  </p:cSld>
+  <p:clrMapOvr>
+    <a:masterClrMapping/>
+  </p:clrMapOvr>
+</p:sld>
+</file>
+
+<file path=ppt/slides/slide18.xml><?xml version="1.0" encoding="utf-8"?>
+<p:sld xmlns:a="http://schemas.openxmlformats.org/drawingml/2006/main" xmlns:r="http://schemas.openxmlformats.org/officeDocument/2006/relationships" xmlns:p="http://schemas.openxmlformats.org/presentationml/2006/main">
+  <p:cSld>
+    <p:spTree>
+      <p:nvGrpSpPr>
+        <p:cNvPr id="1" name=""/>
+        <p:cNvGrpSpPr/>
+        <p:nvPr/>
+      </p:nvGrpSpPr>
+      <p:grpSpPr>
+        <a:xfrm>
+          <a:off x="0" y="0"/>
+          <a:ext cx="0" cy="0"/>
+          <a:chOff x="0" y="0"/>
+          <a:chExt cx="0" cy="0"/>
+        </a:xfrm>
+      </p:grpSpPr>
+      <p:sp>
+        <p:nvSpPr>
           <p:cNvPr id="2" name="Title 1"/>
           <p:cNvSpPr>
             <a:spLocks noGrp="1"/>
@@ -8158,7 +8484,7 @@
             <a:fld id="{463AA0C4-D338-4B8B-AF76-FA6D5AEDADCF}" type="slidenum">
               <a:rPr lang="en-US" altLang="en-US"/>
               <a:pPr/>
-              <a:t>16</a:t>
+              <a:t>18</a:t>
             </a:fld>
             <a:endParaRPr lang="en-US" altLang="en-US"/>
           </a:p>
@@ -8753,7 +9079,7 @@
           <p:cNvPr id="3" name="Rectangle: Rounded Corners 2">
             <a:extLst>
               <a:ext uri="{FF2B5EF4-FFF2-40B4-BE49-F238E27FC236}">
-                <a16:creationId xmlns:a16="http://schemas.microsoft.com/office/drawing/2014/main" xmlns="" id="{E4719FAE-2B2A-2867-13AF-A7C95DD86BCB}"/>
+                <a16:creationId xmlns="" xmlns:a16="http://schemas.microsoft.com/office/drawing/2014/main" id="{E4719FAE-2B2A-2867-13AF-A7C95DD86BCB}"/>
               </a:ext>
             </a:extLst>
           </p:cNvPr>
@@ -8802,7 +9128,7 @@
           <p:cNvPr id="10" name="Rectangle: Rounded Corners 9">
             <a:extLst>
               <a:ext uri="{FF2B5EF4-FFF2-40B4-BE49-F238E27FC236}">
-                <a16:creationId xmlns:a16="http://schemas.microsoft.com/office/drawing/2014/main" xmlns="" id="{05AA0327-BE9F-FD78-9119-B88D77398C6D}"/>
+                <a16:creationId xmlns="" xmlns:a16="http://schemas.microsoft.com/office/drawing/2014/main" id="{05AA0327-BE9F-FD78-9119-B88D77398C6D}"/>
               </a:ext>
             </a:extLst>
           </p:cNvPr>
@@ -8851,7 +9177,7 @@
           <p:cNvPr id="11" name="Rectangle: Rounded Corners 10">
             <a:extLst>
               <a:ext uri="{FF2B5EF4-FFF2-40B4-BE49-F238E27FC236}">
-                <a16:creationId xmlns:a16="http://schemas.microsoft.com/office/drawing/2014/main" xmlns="" id="{7E1C6CAE-DAB8-93BE-A101-44369FE5EB4E}"/>
+                <a16:creationId xmlns="" xmlns:a16="http://schemas.microsoft.com/office/drawing/2014/main" id="{7E1C6CAE-DAB8-93BE-A101-44369FE5EB4E}"/>
               </a:ext>
             </a:extLst>
           </p:cNvPr>
@@ -8900,7 +9226,7 @@
           <p:cNvPr id="12" name="Rectangle: Rounded Corners 11">
             <a:extLst>
               <a:ext uri="{FF2B5EF4-FFF2-40B4-BE49-F238E27FC236}">
-                <a16:creationId xmlns:a16="http://schemas.microsoft.com/office/drawing/2014/main" xmlns="" id="{B4FE8781-F374-3591-77DF-FD63FF00EBB6}"/>
+                <a16:creationId xmlns="" xmlns:a16="http://schemas.microsoft.com/office/drawing/2014/main" id="{B4FE8781-F374-3591-77DF-FD63FF00EBB6}"/>
               </a:ext>
             </a:extLst>
           </p:cNvPr>
@@ -8949,7 +9275,7 @@
           <p:cNvPr id="22" name="Straight Arrow Connector 21">
             <a:extLst>
               <a:ext uri="{FF2B5EF4-FFF2-40B4-BE49-F238E27FC236}">
-                <a16:creationId xmlns:a16="http://schemas.microsoft.com/office/drawing/2014/main" xmlns="" id="{A4DC359F-4B7B-A085-CB36-620DC6F625DC}"/>
+                <a16:creationId xmlns="" xmlns:a16="http://schemas.microsoft.com/office/drawing/2014/main" id="{A4DC359F-4B7B-A085-CB36-620DC6F625DC}"/>
               </a:ext>
             </a:extLst>
           </p:cNvPr>
@@ -8991,7 +9317,7 @@
           <p:cNvPr id="23" name="Straight Arrow Connector 22">
             <a:extLst>
               <a:ext uri="{FF2B5EF4-FFF2-40B4-BE49-F238E27FC236}">
-                <a16:creationId xmlns:a16="http://schemas.microsoft.com/office/drawing/2014/main" xmlns="" id="{3711F014-7DAA-8B1A-B1C3-5D553D08A3A2}"/>
+                <a16:creationId xmlns="" xmlns:a16="http://schemas.microsoft.com/office/drawing/2014/main" id="{3711F014-7DAA-8B1A-B1C3-5D553D08A3A2}"/>
               </a:ext>
             </a:extLst>
           </p:cNvPr>
@@ -9030,7 +9356,7 @@
           <p:cNvPr id="24" name="Straight Arrow Connector 23">
             <a:extLst>
               <a:ext uri="{FF2B5EF4-FFF2-40B4-BE49-F238E27FC236}">
-                <a16:creationId xmlns:a16="http://schemas.microsoft.com/office/drawing/2014/main" xmlns="" id="{25E0DE3C-B700-E96A-D355-2DBFE0A51924}"/>
+                <a16:creationId xmlns="" xmlns:a16="http://schemas.microsoft.com/office/drawing/2014/main" id="{25E0DE3C-B700-E96A-D355-2DBFE0A51924}"/>
               </a:ext>
             </a:extLst>
           </p:cNvPr>
@@ -9125,7 +9451,7 @@
           <p:cNvPr id="6" name="Content Placeholder 5">
             <a:extLst>
               <a:ext uri="{FF2B5EF4-FFF2-40B4-BE49-F238E27FC236}">
-                <a16:creationId xmlns:a16="http://schemas.microsoft.com/office/drawing/2014/main" xmlns="" id="{BB494910-D9AC-A49B-3C7F-16EAF8A03F6A}"/>
+                <a16:creationId xmlns="" xmlns:a16="http://schemas.microsoft.com/office/drawing/2014/main" id="{BB494910-D9AC-A49B-3C7F-16EAF8A03F6A}"/>
               </a:ext>
             </a:extLst>
           </p:cNvPr>
@@ -9155,42 +9481,42 @@
                 <a:gridCol w="1447800">
                   <a:extLst>
                     <a:ext uri="{9D8B030D-6E8A-4147-A177-3AD203B41FA5}">
-                      <a16:colId xmlns:a16="http://schemas.microsoft.com/office/drawing/2014/main" xmlns="" val="3907681837"/>
+                      <a16:colId xmlns="" xmlns:a16="http://schemas.microsoft.com/office/drawing/2014/main" val="3907681837"/>
                     </a:ext>
                   </a:extLst>
                 </a:gridCol>
                 <a:gridCol w="1600200">
                   <a:extLst>
                     <a:ext uri="{9D8B030D-6E8A-4147-A177-3AD203B41FA5}">
-                      <a16:colId xmlns:a16="http://schemas.microsoft.com/office/drawing/2014/main" xmlns="" val="3976524410"/>
+                      <a16:colId xmlns="" xmlns:a16="http://schemas.microsoft.com/office/drawing/2014/main" val="3976524410"/>
                     </a:ext>
                   </a:extLst>
                 </a:gridCol>
                 <a:gridCol w="2133600">
                   <a:extLst>
                     <a:ext uri="{9D8B030D-6E8A-4147-A177-3AD203B41FA5}">
-                      <a16:colId xmlns:a16="http://schemas.microsoft.com/office/drawing/2014/main" xmlns="" val="3601312617"/>
+                      <a16:colId xmlns="" xmlns:a16="http://schemas.microsoft.com/office/drawing/2014/main" val="3601312617"/>
                     </a:ext>
                   </a:extLst>
                 </a:gridCol>
                 <a:gridCol w="2184400">
                   <a:extLst>
                     <a:ext uri="{9D8B030D-6E8A-4147-A177-3AD203B41FA5}">
-                      <a16:colId xmlns:a16="http://schemas.microsoft.com/office/drawing/2014/main" xmlns="" val="3931388399"/>
+                      <a16:colId xmlns="" xmlns:a16="http://schemas.microsoft.com/office/drawing/2014/main" val="3931388399"/>
                     </a:ext>
                   </a:extLst>
                 </a:gridCol>
                 <a:gridCol w="1841500">
                   <a:extLst>
                     <a:ext uri="{9D8B030D-6E8A-4147-A177-3AD203B41FA5}">
-                      <a16:colId xmlns:a16="http://schemas.microsoft.com/office/drawing/2014/main" xmlns="" val="248621489"/>
+                      <a16:colId xmlns="" xmlns:a16="http://schemas.microsoft.com/office/drawing/2014/main" val="248621489"/>
                     </a:ext>
                   </a:extLst>
                 </a:gridCol>
                 <a:gridCol w="1841500">
                   <a:extLst>
                     <a:ext uri="{9D8B030D-6E8A-4147-A177-3AD203B41FA5}">
-                      <a16:colId xmlns:a16="http://schemas.microsoft.com/office/drawing/2014/main" xmlns="" val="1610093789"/>
+                      <a16:colId xmlns="" xmlns:a16="http://schemas.microsoft.com/office/drawing/2014/main" val="1610093789"/>
                     </a:ext>
                   </a:extLst>
                 </a:gridCol>
@@ -9282,7 +9608,7 @@
                 </a:tc>
                 <a:extLst>
                   <a:ext uri="{0D108BD9-81ED-4DB2-BD59-A6C34878D82A}">
-                    <a16:rowId xmlns:a16="http://schemas.microsoft.com/office/drawing/2014/main" xmlns="" val="1802335097"/>
+                    <a16:rowId xmlns="" xmlns:a16="http://schemas.microsoft.com/office/drawing/2014/main" val="1802335097"/>
                   </a:ext>
                 </a:extLst>
               </a:tr>
@@ -9406,7 +9732,7 @@
                 </a:tc>
                 <a:extLst>
                   <a:ext uri="{0D108BD9-81ED-4DB2-BD59-A6C34878D82A}">
-                    <a16:rowId xmlns:a16="http://schemas.microsoft.com/office/drawing/2014/main" xmlns="" val="1074852068"/>
+                    <a16:rowId xmlns="" xmlns:a16="http://schemas.microsoft.com/office/drawing/2014/main" val="1074852068"/>
                   </a:ext>
                 </a:extLst>
               </a:tr>
@@ -9502,7 +9828,7 @@
                 </a:tc>
                 <a:extLst>
                   <a:ext uri="{0D108BD9-81ED-4DB2-BD59-A6C34878D82A}">
-                    <a16:rowId xmlns:a16="http://schemas.microsoft.com/office/drawing/2014/main" xmlns="" val="3754218183"/>
+                    <a16:rowId xmlns="" xmlns:a16="http://schemas.microsoft.com/office/drawing/2014/main" val="3754218183"/>
                   </a:ext>
                 </a:extLst>
               </a:tr>
@@ -9607,7 +9933,7 @@
                 </a:tc>
                 <a:extLst>
                   <a:ext uri="{0D108BD9-81ED-4DB2-BD59-A6C34878D82A}">
-                    <a16:rowId xmlns:a16="http://schemas.microsoft.com/office/drawing/2014/main" xmlns="" val="1489034478"/>
+                    <a16:rowId xmlns="" xmlns:a16="http://schemas.microsoft.com/office/drawing/2014/main" val="1489034478"/>
                   </a:ext>
                 </a:extLst>
               </a:tr>
@@ -9704,7 +10030,7 @@
                 </a:tc>
                 <a:extLst>
                   <a:ext uri="{0D108BD9-81ED-4DB2-BD59-A6C34878D82A}">
-                    <a16:rowId xmlns:a16="http://schemas.microsoft.com/office/drawing/2014/main" xmlns="" val="2786096180"/>
+                    <a16:rowId xmlns="" xmlns:a16="http://schemas.microsoft.com/office/drawing/2014/main" val="2786096180"/>
                   </a:ext>
                 </a:extLst>
               </a:tr>
@@ -9813,7 +10139,7 @@
                 </a:tc>
                 <a:extLst>
                   <a:ext uri="{0D108BD9-81ED-4DB2-BD59-A6C34878D82A}">
-                    <a16:rowId xmlns:a16="http://schemas.microsoft.com/office/drawing/2014/main" xmlns="" val="1240891534"/>
+                    <a16:rowId xmlns="" xmlns:a16="http://schemas.microsoft.com/office/drawing/2014/main" val="1240891534"/>
                   </a:ext>
                 </a:extLst>
               </a:tr>
